--- a/Schools_ML_Track/camp_2026/slides/DA/DA20.pptx
+++ b/Schools_ML_Track/camp_2026/slides/DA/DA20.pptx
@@ -117,7 +117,7 @@
   <p:extLst>
     <p:ext uri="{521415D9-36F7-43E2-AB2F-B90AF26B5E84}">
       <p14:sectionLst xmlns:p14="http://schemas.microsoft.com/office/powerpoint/2010/main">
-        <p14:section name="Opening" id="{0597e99a-e5a0-1950-ca06-df168640db37}">
+        <p14:section name="Opening" id="{341bed39-5556-30ed-5078-8869a9748c34}">
           <p14:sldIdLst>
             <p14:sldId id="256"/>
             <p14:sldId id="257"/>
@@ -128,7 +128,7 @@
             <p14:sldId id="262"/>
           </p14:sldIdLst>
         </p14:section>
-        <p14:section name="Make and close" id="{45861159-a336-b676-c02a-d1af993487cc}">
+        <p14:section name="Make and close" id="{52ef1a11-2256-80c2-59e6-8282ff0b4217}">
           <p14:sldIdLst>
             <p14:sldId id="263"/>
             <p14:sldId id="264"/>

--- a/Schools_ML_Track/camp_2026/slides/DA/DA20.pptx
+++ b/Schools_ML_Track/camp_2026/slides/DA/DA20.pptx
@@ -117,7 +117,7 @@
   <p:extLst>
     <p:ext uri="{521415D9-36F7-43E2-AB2F-B90AF26B5E84}">
       <p14:sectionLst xmlns:p14="http://schemas.microsoft.com/office/powerpoint/2010/main">
-        <p14:section name="Opening" id="{341bed39-5556-30ed-5078-8869a9748c34}">
+        <p14:section name="Opening" id="{c50c9d38-4bf0-b6f4-e355-507ea478ea6a}">
           <p14:sldIdLst>
             <p14:sldId id="256"/>
             <p14:sldId id="257"/>
@@ -128,7 +128,7 @@
             <p14:sldId id="262"/>
           </p14:sldIdLst>
         </p14:section>
-        <p14:section name="Make and close" id="{52ef1a11-2256-80c2-59e6-8282ff0b4217}">
+        <p14:section name="Make and close" id="{11fd8606-4b6f-221c-d763-76be56e22c78}">
           <p14:sldIdLst>
             <p14:sldId id="263"/>
             <p14:sldId id="264"/>
@@ -4205,15 +4205,15 @@
           <a:p>
             <a:pPr algn="l" indent="0" marL="0">
               <a:lnSpc>
-                <a:spcPts val="3600"/>
+                <a:spcPts val="3360"/>
               </a:lnSpc>
               <a:spcAft>
-                <a:spcPts val="2520"/>
+                <a:spcPts val="2020"/>
               </a:spcAft>
               <a:buNone/>
             </a:pPr>
             <a:r>
-              <a:rPr lang="en-US" sz="3000" dirty="0">
+              <a:rPr lang="en-US" sz="2800" dirty="0">
                 <a:solidFill>
                   <a:srgbClr val="111111"/>
                 </a:solidFill>
@@ -4221,9 +4221,55 @@
                 <a:ea typeface="Lato" pitchFamily="34" charset="-122"/>
                 <a:cs typeface="Lato" pitchFamily="34" charset="-120"/>
               </a:rPr>
-              <a:t>Work from a protected copy of the raw data. Write the cleaning log, including a log that says no change was needed if that is true. Build one calculation at a time. For each, compare with a small hand-worked example and with a second route (pandas against NumPy, or a merged total against an unmerged one).</a:t>
-            </a:r>
-            <a:endParaRPr lang="en-US" sz="3000" dirty="0"/>
+              <a:t>Work from a protected copy of the raw data.</a:t>
+            </a:r>
+            <a:endParaRPr lang="en-US" sz="2800" dirty="0"/>
+          </a:p>
+          <a:p>
+            <a:pPr algn="l" indent="0" marL="0">
+              <a:lnSpc>
+                <a:spcPts val="3360"/>
+              </a:lnSpc>
+              <a:spcAft>
+                <a:spcPts val="2020"/>
+              </a:spcAft>
+              <a:buNone/>
+            </a:pPr>
+            <a:r>
+              <a:rPr lang="en-US" sz="2800" dirty="0">
+                <a:solidFill>
+                  <a:srgbClr val="111111"/>
+                </a:solidFill>
+                <a:latin typeface="Lato" pitchFamily="34" charset="0"/>
+                <a:ea typeface="Lato" pitchFamily="34" charset="-122"/>
+                <a:cs typeface="Lato" pitchFamily="34" charset="-120"/>
+              </a:rPr>
+              <a:t>Write the cleaning log, including a log that says no change was needed if that is true.</a:t>
+            </a:r>
+            <a:endParaRPr lang="en-US" sz="2800" dirty="0"/>
+          </a:p>
+          <a:p>
+            <a:pPr algn="l" indent="0" marL="0">
+              <a:lnSpc>
+                <a:spcPts val="3360"/>
+              </a:lnSpc>
+              <a:spcAft>
+                <a:spcPts val="2020"/>
+              </a:spcAft>
+              <a:buNone/>
+            </a:pPr>
+            <a:r>
+              <a:rPr lang="en-US" sz="2800" dirty="0">
+                <a:solidFill>
+                  <a:srgbClr val="111111"/>
+                </a:solidFill>
+                <a:latin typeface="Lato" pitchFamily="34" charset="0"/>
+                <a:ea typeface="Lato" pitchFamily="34" charset="-122"/>
+                <a:cs typeface="Lato" pitchFamily="34" charset="-120"/>
+              </a:rPr>
+              <a:t>Build one calculation at a time.</a:t>
+            </a:r>
+            <a:endParaRPr lang="en-US" sz="2800" dirty="0"/>
           </a:p>
         </p:txBody>
       </p:sp>
@@ -4388,15 +4434,15 @@
           <a:p>
             <a:pPr algn="l" indent="0" marL="0">
               <a:lnSpc>
-                <a:spcPts val="3600"/>
+                <a:spcPts val="2760"/>
               </a:lnSpc>
               <a:spcAft>
-                <a:spcPts val="2520"/>
+                <a:spcPts val="2020"/>
               </a:spcAft>
               <a:buNone/>
             </a:pPr>
             <a:r>
-              <a:rPr lang="en-US" sz="3000" dirty="0">
+              <a:rPr lang="en-US" sz="2300" dirty="0">
                 <a:solidFill>
                   <a:srgbClr val="111111"/>
                 </a:solidFill>
@@ -4404,22 +4450,68 @@
                 <a:ea typeface="Lato" pitchFamily="34" charset="-122"/>
                 <a:cs typeface="Lato" pitchFamily="34" charset="-120"/>
               </a:rPr>
-              <a:t>Ask a partner to rerun one calculation from your notebook. Write down the first discrepancy they find and fix it.</a:t>
-            </a:r>
-            <a:endParaRPr lang="en-US" sz="3000" dirty="0"/>
+              <a:t>For each, compare with a small hand-worked example and with a second route (pandas against NumPy, or a merged total against an unmerged one).</a:t>
+            </a:r>
+            <a:endParaRPr lang="en-US" sz="2300" dirty="0"/>
           </a:p>
           <a:p>
             <a:pPr algn="l" indent="0" marL="0">
               <a:lnSpc>
-                <a:spcPts val="3600"/>
+                <a:spcPts val="2760"/>
               </a:lnSpc>
               <a:spcAft>
-                <a:spcPts val="2520"/>
+                <a:spcPts val="2020"/>
               </a:spcAft>
               <a:buNone/>
             </a:pPr>
             <a:r>
-              <a:rPr lang="en-US" sz="3000" dirty="0">
+              <a:rPr lang="en-US" sz="2300" dirty="0">
+                <a:solidFill>
+                  <a:srgbClr val="111111"/>
+                </a:solidFill>
+                <a:latin typeface="Lato" pitchFamily="34" charset="0"/>
+                <a:ea typeface="Lato" pitchFamily="34" charset="-122"/>
+                <a:cs typeface="Lato" pitchFamily="34" charset="-120"/>
+              </a:rPr>
+              <a:t>Ask a partner to rerun one calculation from your notebook.</a:t>
+            </a:r>
+            <a:endParaRPr lang="en-US" sz="2300" dirty="0"/>
+          </a:p>
+          <a:p>
+            <a:pPr algn="l" indent="0" marL="0">
+              <a:lnSpc>
+                <a:spcPts val="2760"/>
+              </a:lnSpc>
+              <a:spcAft>
+                <a:spcPts val="2020"/>
+              </a:spcAft>
+              <a:buNone/>
+            </a:pPr>
+            <a:r>
+              <a:rPr lang="en-US" sz="2300" dirty="0">
+                <a:solidFill>
+                  <a:srgbClr val="111111"/>
+                </a:solidFill>
+                <a:latin typeface="Lato" pitchFamily="34" charset="0"/>
+                <a:ea typeface="Lato" pitchFamily="34" charset="-122"/>
+                <a:cs typeface="Lato" pitchFamily="34" charset="-120"/>
+              </a:rPr>
+              <a:t>Write down the first discrepancy they find and fix it.</a:t>
+            </a:r>
+            <a:endParaRPr lang="en-US" sz="2300" dirty="0"/>
+          </a:p>
+          <a:p>
+            <a:pPr algn="l" indent="0" marL="0">
+              <a:lnSpc>
+                <a:spcPts val="2760"/>
+              </a:lnSpc>
+              <a:spcAft>
+                <a:spcPts val="2020"/>
+              </a:spcAft>
+              <a:buNone/>
+            </a:pPr>
+            <a:r>
+              <a:rPr lang="en-US" sz="2300" dirty="0">
                 <a:solidFill>
                   <a:srgbClr val="111111"/>
                 </a:solidFill>
@@ -4429,7 +4521,7 @@
               </a:rPr>
               <a:t>Save it as DA20. Write two sentences: what you changed and how you checked it.</a:t>
             </a:r>
-            <a:endParaRPr lang="en-US" sz="3000" dirty="0"/>
+            <a:endParaRPr lang="en-US" sz="2300" dirty="0"/>
           </a:p>
         </p:txBody>
       </p:sp>
